--- a/ゲーム科2年/00_前期/ゲーム開発Ⅰ/15_ZバッファとZソート.pptx
+++ b/ゲーム科2年/00_前期/ゲーム開発Ⅰ/15_ZバッファとZソート.pptx
@@ -280,7 +280,7 @@
           <a:p>
             <a:fld id="{E9CC885B-4903-4D54-9A93-00025F12DED9}" type="datetimeFigureOut">
               <a:rPr kumimoji="1" lang="ja-JP" altLang="en-US" smtClean="0"/>
-              <a:t>2024/11/21</a:t>
+              <a:t>2025/2/7</a:t>
             </a:fld>
             <a:endParaRPr kumimoji="1" lang="ja-JP" altLang="en-US"/>
           </a:p>
@@ -510,7 +510,7 @@
           <a:p>
             <a:fld id="{E9CC885B-4903-4D54-9A93-00025F12DED9}" type="datetimeFigureOut">
               <a:rPr kumimoji="1" lang="ja-JP" altLang="en-US" smtClean="0"/>
-              <a:t>2024/11/21</a:t>
+              <a:t>2025/2/7</a:t>
             </a:fld>
             <a:endParaRPr kumimoji="1" lang="ja-JP" altLang="en-US"/>
           </a:p>
@@ -750,7 +750,7 @@
           <a:p>
             <a:fld id="{E9CC885B-4903-4D54-9A93-00025F12DED9}" type="datetimeFigureOut">
               <a:rPr kumimoji="1" lang="ja-JP" altLang="en-US" smtClean="0"/>
-              <a:t>2024/11/21</a:t>
+              <a:t>2025/2/7</a:t>
             </a:fld>
             <a:endParaRPr kumimoji="1" lang="ja-JP" altLang="en-US"/>
           </a:p>
@@ -980,7 +980,7 @@
           <a:p>
             <a:fld id="{E9CC885B-4903-4D54-9A93-00025F12DED9}" type="datetimeFigureOut">
               <a:rPr kumimoji="1" lang="ja-JP" altLang="en-US" smtClean="0"/>
-              <a:t>2024/11/21</a:t>
+              <a:t>2025/2/7</a:t>
             </a:fld>
             <a:endParaRPr kumimoji="1" lang="ja-JP" altLang="en-US"/>
           </a:p>
@@ -1255,7 +1255,7 @@
           <a:p>
             <a:fld id="{E9CC885B-4903-4D54-9A93-00025F12DED9}" type="datetimeFigureOut">
               <a:rPr kumimoji="1" lang="ja-JP" altLang="en-US" smtClean="0"/>
-              <a:t>2024/11/21</a:t>
+              <a:t>2025/2/7</a:t>
             </a:fld>
             <a:endParaRPr kumimoji="1" lang="ja-JP" altLang="en-US"/>
           </a:p>
@@ -1584,7 +1584,7 @@
           <a:p>
             <a:fld id="{E9CC885B-4903-4D54-9A93-00025F12DED9}" type="datetimeFigureOut">
               <a:rPr kumimoji="1" lang="ja-JP" altLang="en-US" smtClean="0"/>
-              <a:t>2024/11/21</a:t>
+              <a:t>2025/2/7</a:t>
             </a:fld>
             <a:endParaRPr kumimoji="1" lang="ja-JP" altLang="en-US"/>
           </a:p>
@@ -2060,7 +2060,7 @@
           <a:p>
             <a:fld id="{E9CC885B-4903-4D54-9A93-00025F12DED9}" type="datetimeFigureOut">
               <a:rPr kumimoji="1" lang="ja-JP" altLang="en-US" smtClean="0"/>
-              <a:t>2024/11/21</a:t>
+              <a:t>2025/2/7</a:t>
             </a:fld>
             <a:endParaRPr kumimoji="1" lang="ja-JP" altLang="en-US"/>
           </a:p>
@@ -2201,7 +2201,7 @@
           <a:p>
             <a:fld id="{E9CC885B-4903-4D54-9A93-00025F12DED9}" type="datetimeFigureOut">
               <a:rPr kumimoji="1" lang="ja-JP" altLang="en-US" smtClean="0"/>
-              <a:t>2024/11/21</a:t>
+              <a:t>2025/2/7</a:t>
             </a:fld>
             <a:endParaRPr kumimoji="1" lang="ja-JP" altLang="en-US"/>
           </a:p>
@@ -2314,7 +2314,7 @@
           <a:p>
             <a:fld id="{E9CC885B-4903-4D54-9A93-00025F12DED9}" type="datetimeFigureOut">
               <a:rPr kumimoji="1" lang="ja-JP" altLang="en-US" smtClean="0"/>
-              <a:t>2024/11/21</a:t>
+              <a:t>2025/2/7</a:t>
             </a:fld>
             <a:endParaRPr kumimoji="1" lang="ja-JP" altLang="en-US"/>
           </a:p>
@@ -2657,7 +2657,7 @@
           <a:p>
             <a:fld id="{E9CC885B-4903-4D54-9A93-00025F12DED9}" type="datetimeFigureOut">
               <a:rPr kumimoji="1" lang="ja-JP" altLang="en-US" smtClean="0"/>
-              <a:t>2024/11/21</a:t>
+              <a:t>2025/2/7</a:t>
             </a:fld>
             <a:endParaRPr kumimoji="1" lang="ja-JP" altLang="en-US"/>
           </a:p>
@@ -2945,7 +2945,7 @@
           <a:p>
             <a:fld id="{E9CC885B-4903-4D54-9A93-00025F12DED9}" type="datetimeFigureOut">
               <a:rPr kumimoji="1" lang="ja-JP" altLang="en-US" smtClean="0"/>
-              <a:t>2024/11/21</a:t>
+              <a:t>2025/2/7</a:t>
             </a:fld>
             <a:endParaRPr kumimoji="1" lang="ja-JP" altLang="en-US"/>
           </a:p>
@@ -3218,7 +3218,7 @@
           <a:p>
             <a:fld id="{E9CC885B-4903-4D54-9A93-00025F12DED9}" type="datetimeFigureOut">
               <a:rPr kumimoji="1" lang="ja-JP" altLang="en-US" smtClean="0"/>
-              <a:t>2024/11/21</a:t>
+              <a:t>2025/2/7</a:t>
             </a:fld>
             <a:endParaRPr kumimoji="1" lang="ja-JP" altLang="en-US"/>
           </a:p>
@@ -5122,7 +5122,11 @@
                   <a:srgbClr val="FF0000"/>
                 </a:solidFill>
               </a:rPr>
-              <a:t>カメラまでの距離を記録する配列を</a:t>
+              <a:t>カメラまでの距離を記録する配列</a:t>
+            </a:r>
+            <a:r>
+              <a:rPr lang="ja-JP" altLang="en-US" sz="2400" dirty="0"/>
+              <a:t>を</a:t>
             </a:r>
             <a:r>
               <a:rPr lang="en-US" altLang="ja-JP" sz="2400" b="1" dirty="0">
